--- a/docs/presentation/Carbon-Urban-DSS-소개-전주사례.pptx
+++ b/docs/presentation/Carbon-Urban-DSS-소개-전주사례.pptx
@@ -4983,7 +4983,7 @@
           <a:p>
             <a:r>
               <a:rPr lang="en-US" dirty="0"/>
-              <a:t>다음 단계는 다섯 가지입니다. 전주 건축HUB 2020년부터 2023년 자료는 옛 시군구 코드로 제공된다는 것을 확인해 수집을 시작했습니다. K-apt 과거 자료까지 받으면 에코시티의 개발 전후를 추정이 아니라 관측으로 비교할 수 있습니다. 지역난방과 가스 공식 계수를 확보해 감축 계산을 전체 운영탄소로 넓히고, 100m 격자는 우선순위 칸부터 받습니다. 세종, 부산 강서, 서울 강동은 탄소공간지도가 이미 있어 상세 자료만 모으면 곧바로 같은 분석을 할 수 있습니다.</a:t>
+              <a:t>다음 단계는 다섯 가지입니다. 전주 건축HUB 2020년부터 2023년 자료는 옛 시군구 코드로 받아 두었고, 이를 개발 전후를 같은 건물끼리 비교하는 분석에 넣는 것이 다음 일입니다. K-apt 과거 자료까지 받으면 에코시티의 개발 전후를 추정이 아니라 관측으로 비교할 수 있습니다. 지역난방과 가스 공식 계수를 확보해 감축 계산을 전체 운영탄소로 넓히고, 100m 격자는 우선순위 칸부터 받습니다. 세종, 부산 강서, 서울 강동은 탄소공간지도가 이미 있어 상세 자료만 모으면 곧바로 같은 분석을 할 수 있습니다.</a:t>
             </a:r>
             <a:endParaRPr lang="en-US" dirty="0"/>
           </a:p>
@@ -5599,7 +5599,7 @@
           <a:p>
             <a:r>
               <a:rPr lang="en-US" dirty="0"/>
-              <a:t>자료마다 덮는 기간이 다릅니다. 파란색 공식 통계는 대부분 2015년 무렵부터 있어 긴 추세를 봅니다. 보라색 탄소공간지도는 2016, 2019, 2022, 2024년 네 해의 격자 값입니다. 주황색 건물 단위 관측은 짧습니다. 건축HUB는 지금 2024년과 2025년이 있고, 전주의 2020년부터 2023년은 옛 시군구 코드로 요청해야 나온다는 것을 확인해 수집을 시작했습니다. K-apt 관리비 에너지는 2021년부터 관측이 있고 그 이전은 하루 호출 한도 때문에 보류 중입니다. 그래서 긴 변화는 공식 통계와 탄소공간지도로, 최근의 격자 단위 분포는 건물 관측으로 봅니다.</a:t>
+              <a:t>자료마다 덮는 기간이 다릅니다. 파란색 공식 통계는 대부분 2015년 무렵부터 있어 긴 추세를 봅니다. 보라색 탄소공간지도는 2016, 2019, 2022, 2024년 네 해의 격자 값입니다. 주황색 건물 단위 관측은 짧습니다. 건축HUB는 전주의 2020년부터 2023년이 옛 시군구 코드로 요청해야 나온다는 것을 확인해 받아서, 지금 전주는 2020년부터 2025년까지 있습니다. K-apt 관리비 에너지는 2021년부터 관측이 있고 그 이전은 하루 호출 한도 때문에 보류 중입니다. 그래서 긴 변화는 공식 통계와 탄소공간지도로, 최근의 격자 단위 분포는 건물 관측으로 봅니다.</a:t>
             </a:r>
             <a:endParaRPr lang="en-US" dirty="0"/>
           </a:p>
@@ -26692,7 +26692,7 @@
                 <a:ea typeface="Malgun Gothic" pitchFamily="34" charset="-122"/>
                 <a:cs typeface="Malgun Gothic" pitchFamily="34" charset="-120"/>
               </a:rPr>
-              <a:t>건물 전체 기준: PC API가 낸 구역 건축HUB 값에 같은 산식(effort, basis=buildings)을 적용 · 전력 운영탄소만</a:t>
+              <a:t>기준 건물 선택은 이번에 추가한 기능(지역 시뮬레이션 → 감축 노력 → 기준 건물) · 전력 운영탄소만</a:t>
             </a:r>
             <a:endParaRPr lang="en-US" sz="900" dirty="0"/>
           </a:p>
@@ -31758,7 +31758,7 @@
                 <a:ea typeface="Malgun Gothic" pitchFamily="34" charset="-122"/>
                 <a:cs typeface="Malgun Gothic" pitchFamily="34" charset="-120"/>
               </a:rPr>
-              <a:t>건축HUB 2020~2023 (전주)</a:t>
+              <a:t>건축HUB 2020~2023 (전주) 활용</a:t>
             </a:r>
             <a:endParaRPr lang="en-US" sz="1400" dirty="0"/>
           </a:p>
@@ -31800,7 +31800,7 @@
                 <a:ea typeface="Malgun Gothic" pitchFamily="34" charset="-122"/>
                 <a:cs typeface="Malgun Gothic" pitchFamily="34" charset="-120"/>
               </a:rPr>
-              <a:t>옛 시·군·구 코드(45xxx)로 요청하면 제공됨을 확인 (표본 법정동 7월 609~715건). 수집을 시작했고, 받으면 개발 전후를 같은 지번끼리 비교합니다.</a:t>
+              <a:t>옛 시·군·구 코드(45xxx)로 요청해 받았습니다(전력 연 약 1.7만 지번). 다음은 개발 전후를 같은 건물(지번)끼리 비교하는 분석에 넣는 것입니다.</a:t>
             </a:r>
             <a:endParaRPr lang="en-US" sz="1150" dirty="0"/>
           </a:p>
@@ -34305,7 +34305,7 @@
                 <a:ea typeface="Malgun Gothic" pitchFamily="34" charset="-122"/>
                 <a:cs typeface="Malgun Gothic" pitchFamily="34" charset="-120"/>
               </a:rPr>
-              <a:t>팀 탄소공간지도 연동, 상업지 감축 기준 추가</a:t>
+              <a:t>탄소공간지도 연동, 상업지 감축 기준, 건축HUB 2020~23</a:t>
             </a:r>
             <a:endParaRPr lang="en-US" sz="1250" dirty="0"/>
           </a:p>
@@ -38137,7 +38137,7 @@
                 <a:ea typeface="Malgun Gothic" pitchFamily="34" charset="-122"/>
                 <a:cs typeface="Malgun Gothic" pitchFamily="34" charset="-120"/>
               </a:rPr>
-              <a:t>지번·월 · 2024~ (2020~23 수집 중)</a:t>
+              <a:t>지번·월 · 전주 2020~ · 수원 2025</a:t>
             </a:r>
             <a:endParaRPr lang="en-US" sz="1050" dirty="0"/>
           </a:p>
@@ -44049,7 +44049,7 @@
                 <a:ea typeface="Malgun Gothic" pitchFamily="34" charset="-122"/>
                 <a:cs typeface="Malgun Gothic" pitchFamily="34" charset="-120"/>
               </a:rPr>
-              <a:t>건축HUB 건물에너지</a:t>
+              <a:t>건축HUB 건물에너지 (전주)</a:t>
             </a:r>
             <a:endParaRPr lang="en-US" sz="1150" dirty="0"/>
           </a:p>
@@ -44063,8 +44063,8 @@
         </p:nvSpPr>
         <p:spPr>
           <a:xfrm>
-            <a:off x="10125635" y="5440680"/>
-            <a:ext cx="893960" cy="256032"/>
+            <a:off x="8264562" y="5440680"/>
+            <a:ext cx="2755033" cy="256032"/>
           </a:xfrm>
           <a:prstGeom prst="roundRect">
             <a:avLst>
@@ -44090,12 +44090,276 @@
         </p:nvSpPr>
         <p:spPr>
           <a:xfrm>
-            <a:off x="8264562" y="5440680"/>
-            <a:ext cx="1824497" cy="256032"/>
+            <a:off x="3611880" y="6108192"/>
+            <a:ext cx="292608" cy="182880"/>
           </a:xfrm>
           <a:prstGeom prst="roundRect">
             <a:avLst>
-              <a:gd name="adj" fmla="val 17857"/>
+              <a:gd name="adj" fmla="val 20000"/>
+            </a:avLst>
+          </a:prstGeom>
+          <a:solidFill>
+            <a:srgbClr val="3D6FB8"/>
+          </a:solidFill>
+          <a:ln w="12700">
+            <a:solidFill>
+              <a:srgbClr val="3D6FB8"/>
+            </a:solidFill>
+            <a:prstDash val="solid"/>
+          </a:ln>
+        </p:spPr>
+      </p:sp>
+      <p:sp>
+        <p:nvSpPr>
+          <p:cNvPr id="50" name="Text 48"/>
+          <p:cNvSpPr txBox="1"/>
+          <p:nvPr/>
+        </p:nvSpPr>
+        <p:spPr>
+          <a:xfrm>
+            <a:off x="3995928" y="6080760"/>
+            <a:ext cx="1188720" cy="237744"/>
+          </a:xfrm>
+          <a:prstGeom prst="rect">
+            <a:avLst/>
+          </a:prstGeom>
+          <a:noFill/>
+          <a:ln/>
+        </p:spPr>
+        <p:txBody>
+          <a:bodyPr wrap="square" lIns="0" tIns="0" rIns="0" bIns="0" rtlCol="0" anchor="t"/>
+          <a:lstStyle/>
+          <a:p>
+            <a:pPr indent="0" marL="0">
+              <a:buNone/>
+            </a:pPr>
+            <a:r>
+              <a:rPr lang="en-US" sz="1050" dirty="0">
+                <a:solidFill>
+                  <a:srgbClr val="505B55"/>
+                </a:solidFill>
+                <a:latin typeface="Malgun Gothic" pitchFamily="34" charset="0"/>
+                <a:ea typeface="Malgun Gothic" pitchFamily="34" charset="-122"/>
+                <a:cs typeface="Malgun Gothic" pitchFamily="34" charset="-120"/>
+              </a:rPr>
+              <a:t>전국 공식 통계</a:t>
+            </a:r>
+            <a:endParaRPr lang="en-US" sz="1050" dirty="0"/>
+          </a:p>
+        </p:txBody>
+      </p:sp>
+      <p:sp>
+        <p:nvSpPr>
+          <p:cNvPr id="51" name="Shape 49"/>
+          <p:cNvSpPr/>
+          <p:nvPr/>
+        </p:nvSpPr>
+        <p:spPr>
+          <a:xfrm>
+            <a:off x="5212080" y="6108192"/>
+            <a:ext cx="292608" cy="182880"/>
+          </a:xfrm>
+          <a:prstGeom prst="roundRect">
+            <a:avLst>
+              <a:gd name="adj" fmla="val 20000"/>
+            </a:avLst>
+          </a:prstGeom>
+          <a:solidFill>
+            <a:srgbClr val="1F7A55"/>
+          </a:solidFill>
+          <a:ln w="12700">
+            <a:solidFill>
+              <a:srgbClr val="1F7A55"/>
+            </a:solidFill>
+            <a:prstDash val="solid"/>
+          </a:ln>
+        </p:spPr>
+      </p:sp>
+      <p:sp>
+        <p:nvSpPr>
+          <p:cNvPr id="52" name="Text 50"/>
+          <p:cNvSpPr txBox="1"/>
+          <p:nvPr/>
+        </p:nvSpPr>
+        <p:spPr>
+          <a:xfrm>
+            <a:off x="5596128" y="6080760"/>
+            <a:ext cx="1188720" cy="237744"/>
+          </a:xfrm>
+          <a:prstGeom prst="rect">
+            <a:avLst/>
+          </a:prstGeom>
+          <a:noFill/>
+          <a:ln/>
+        </p:spPr>
+        <p:txBody>
+          <a:bodyPr wrap="square" lIns="0" tIns="0" rIns="0" bIns="0" rtlCol="0" anchor="t"/>
+          <a:lstStyle/>
+          <a:p>
+            <a:pPr indent="0" marL="0">
+              <a:buNone/>
+            </a:pPr>
+            <a:r>
+              <a:rPr lang="en-US" sz="1050" dirty="0">
+                <a:solidFill>
+                  <a:srgbClr val="505B55"/>
+                </a:solidFill>
+                <a:latin typeface="Malgun Gothic" pitchFamily="34" charset="0"/>
+                <a:ea typeface="Malgun Gothic" pitchFamily="34" charset="-122"/>
+                <a:cs typeface="Malgun Gothic" pitchFamily="34" charset="-120"/>
+              </a:rPr>
+              <a:t>계산 기준</a:t>
+            </a:r>
+            <a:endParaRPr lang="en-US" sz="1050" dirty="0"/>
+          </a:p>
+        </p:txBody>
+      </p:sp>
+      <p:sp>
+        <p:nvSpPr>
+          <p:cNvPr id="53" name="Shape 51"/>
+          <p:cNvSpPr/>
+          <p:nvPr/>
+        </p:nvSpPr>
+        <p:spPr>
+          <a:xfrm>
+            <a:off x="6812280" y="6108192"/>
+            <a:ext cx="292608" cy="182880"/>
+          </a:xfrm>
+          <a:prstGeom prst="roundRect">
+            <a:avLst>
+              <a:gd name="adj" fmla="val 20000"/>
+            </a:avLst>
+          </a:prstGeom>
+          <a:solidFill>
+            <a:srgbClr val="6A4C93"/>
+          </a:solidFill>
+          <a:ln w="12700">
+            <a:solidFill>
+              <a:srgbClr val="6A4C93"/>
+            </a:solidFill>
+            <a:prstDash val="solid"/>
+          </a:ln>
+        </p:spPr>
+      </p:sp>
+      <p:sp>
+        <p:nvSpPr>
+          <p:cNvPr id="54" name="Text 52"/>
+          <p:cNvSpPr txBox="1"/>
+          <p:nvPr/>
+        </p:nvSpPr>
+        <p:spPr>
+          <a:xfrm>
+            <a:off x="7196328" y="6080760"/>
+            <a:ext cx="1188720" cy="237744"/>
+          </a:xfrm>
+          <a:prstGeom prst="rect">
+            <a:avLst/>
+          </a:prstGeom>
+          <a:noFill/>
+          <a:ln/>
+        </p:spPr>
+        <p:txBody>
+          <a:bodyPr wrap="square" lIns="0" tIns="0" rIns="0" bIns="0" rtlCol="0" anchor="t"/>
+          <a:lstStyle/>
+          <a:p>
+            <a:pPr indent="0" marL="0">
+              <a:buNone/>
+            </a:pPr>
+            <a:r>
+              <a:rPr lang="en-US" sz="1050" dirty="0">
+                <a:solidFill>
+                  <a:srgbClr val="505B55"/>
+                </a:solidFill>
+                <a:latin typeface="Malgun Gothic" pitchFamily="34" charset="0"/>
+                <a:ea typeface="Malgun Gothic" pitchFamily="34" charset="-122"/>
+                <a:cs typeface="Malgun Gothic" pitchFamily="34" charset="-120"/>
+              </a:rPr>
+              <a:t>팀 수집 (격자)</a:t>
+            </a:r>
+            <a:endParaRPr lang="en-US" sz="1050" dirty="0"/>
+          </a:p>
+        </p:txBody>
+      </p:sp>
+      <p:sp>
+        <p:nvSpPr>
+          <p:cNvPr id="55" name="Shape 53"/>
+          <p:cNvSpPr/>
+          <p:nvPr/>
+        </p:nvSpPr>
+        <p:spPr>
+          <a:xfrm>
+            <a:off x="8412480" y="6108192"/>
+            <a:ext cx="292608" cy="182880"/>
+          </a:xfrm>
+          <a:prstGeom prst="roundRect">
+            <a:avLst>
+              <a:gd name="adj" fmla="val 20000"/>
+            </a:avLst>
+          </a:prstGeom>
+          <a:solidFill>
+            <a:srgbClr val="D9913A"/>
+          </a:solidFill>
+          <a:ln w="12700">
+            <a:solidFill>
+              <a:srgbClr val="D9913A"/>
+            </a:solidFill>
+            <a:prstDash val="solid"/>
+          </a:ln>
+        </p:spPr>
+      </p:sp>
+      <p:sp>
+        <p:nvSpPr>
+          <p:cNvPr id="56" name="Text 54"/>
+          <p:cNvSpPr txBox="1"/>
+          <p:nvPr/>
+        </p:nvSpPr>
+        <p:spPr>
+          <a:xfrm>
+            <a:off x="8796528" y="6080760"/>
+            <a:ext cx="1188720" cy="237744"/>
+          </a:xfrm>
+          <a:prstGeom prst="rect">
+            <a:avLst/>
+          </a:prstGeom>
+          <a:noFill/>
+          <a:ln/>
+        </p:spPr>
+        <p:txBody>
+          <a:bodyPr wrap="square" lIns="0" tIns="0" rIns="0" bIns="0" rtlCol="0" anchor="t"/>
+          <a:lstStyle/>
+          <a:p>
+            <a:pPr indent="0" marL="0">
+              <a:buNone/>
+            </a:pPr>
+            <a:r>
+              <a:rPr lang="en-US" sz="1050" dirty="0">
+                <a:solidFill>
+                  <a:srgbClr val="505B55"/>
+                </a:solidFill>
+                <a:latin typeface="Malgun Gothic" pitchFamily="34" charset="0"/>
+                <a:ea typeface="Malgun Gothic" pitchFamily="34" charset="-122"/>
+                <a:cs typeface="Malgun Gothic" pitchFamily="34" charset="-120"/>
+              </a:rPr>
+              <a:t>지역 상세 관측</a:t>
+            </a:r>
+            <a:endParaRPr lang="en-US" sz="1050" dirty="0"/>
+          </a:p>
+        </p:txBody>
+      </p:sp>
+      <p:sp>
+        <p:nvSpPr>
+          <p:cNvPr id="57" name="Shape 55"/>
+          <p:cNvSpPr/>
+          <p:nvPr/>
+        </p:nvSpPr>
+        <p:spPr>
+          <a:xfrm>
+            <a:off x="10012680" y="6108192"/>
+            <a:ext cx="292608" cy="182880"/>
+          </a:xfrm>
+          <a:prstGeom prst="roundRect">
+            <a:avLst>
+              <a:gd name="adj" fmla="val 20000"/>
             </a:avLst>
           </a:prstGeom>
           <a:solidFill>
@@ -44111,337 +44375,7 @@
       </p:sp>
       <p:sp>
         <p:nvSpPr>
-          <p:cNvPr id="50" name="Text 48"/>
-          <p:cNvSpPr txBox="1"/>
-          <p:nvPr/>
-        </p:nvSpPr>
-        <p:spPr>
-          <a:xfrm>
-            <a:off x="8264562" y="5449824"/>
-            <a:ext cx="1861073" cy="246888"/>
-          </a:xfrm>
-          <a:prstGeom prst="rect">
-            <a:avLst/>
-          </a:prstGeom>
-          <a:noFill/>
-          <a:ln/>
-        </p:spPr>
-        <p:txBody>
-          <a:bodyPr wrap="square" lIns="0" tIns="0" rIns="0" bIns="0" rtlCol="0" anchor="ctr"/>
-          <a:lstStyle/>
-          <a:p>
-            <a:pPr algn="ctr" indent="0" marL="0">
-              <a:buNone/>
-            </a:pPr>
-            <a:r>
-              <a:rPr lang="en-US" sz="950" dirty="0">
-                <a:solidFill>
-                  <a:srgbClr val="B7792F"/>
-                </a:solidFill>
-                <a:latin typeface="Malgun Gothic" pitchFamily="34" charset="0"/>
-                <a:ea typeface="Malgun Gothic" pitchFamily="34" charset="-122"/>
-                <a:cs typeface="Malgun Gothic" pitchFamily="34" charset="-120"/>
-              </a:rPr>
-              <a:t>2020~23 수집 중</a:t>
-            </a:r>
-            <a:endParaRPr lang="en-US" sz="950" dirty="0"/>
-          </a:p>
-        </p:txBody>
-      </p:sp>
-      <p:sp>
-        <p:nvSpPr>
-          <p:cNvPr id="51" name="Shape 49"/>
-          <p:cNvSpPr/>
-          <p:nvPr/>
-        </p:nvSpPr>
-        <p:spPr>
-          <a:xfrm>
-            <a:off x="3611880" y="6108192"/>
-            <a:ext cx="292608" cy="182880"/>
-          </a:xfrm>
-          <a:prstGeom prst="roundRect">
-            <a:avLst>
-              <a:gd name="adj" fmla="val 20000"/>
-            </a:avLst>
-          </a:prstGeom>
-          <a:solidFill>
-            <a:srgbClr val="3D6FB8"/>
-          </a:solidFill>
-          <a:ln w="12700">
-            <a:solidFill>
-              <a:srgbClr val="3D6FB8"/>
-            </a:solidFill>
-            <a:prstDash val="solid"/>
-          </a:ln>
-        </p:spPr>
-      </p:sp>
-      <p:sp>
-        <p:nvSpPr>
-          <p:cNvPr id="52" name="Text 50"/>
-          <p:cNvSpPr txBox="1"/>
-          <p:nvPr/>
-        </p:nvSpPr>
-        <p:spPr>
-          <a:xfrm>
-            <a:off x="3995928" y="6080760"/>
-            <a:ext cx="1188720" cy="237744"/>
-          </a:xfrm>
-          <a:prstGeom prst="rect">
-            <a:avLst/>
-          </a:prstGeom>
-          <a:noFill/>
-          <a:ln/>
-        </p:spPr>
-        <p:txBody>
-          <a:bodyPr wrap="square" lIns="0" tIns="0" rIns="0" bIns="0" rtlCol="0" anchor="t"/>
-          <a:lstStyle/>
-          <a:p>
-            <a:pPr indent="0" marL="0">
-              <a:buNone/>
-            </a:pPr>
-            <a:r>
-              <a:rPr lang="en-US" sz="1050" dirty="0">
-                <a:solidFill>
-                  <a:srgbClr val="505B55"/>
-                </a:solidFill>
-                <a:latin typeface="Malgun Gothic" pitchFamily="34" charset="0"/>
-                <a:ea typeface="Malgun Gothic" pitchFamily="34" charset="-122"/>
-                <a:cs typeface="Malgun Gothic" pitchFamily="34" charset="-120"/>
-              </a:rPr>
-              <a:t>전국 공식 통계</a:t>
-            </a:r>
-            <a:endParaRPr lang="en-US" sz="1050" dirty="0"/>
-          </a:p>
-        </p:txBody>
-      </p:sp>
-      <p:sp>
-        <p:nvSpPr>
-          <p:cNvPr id="53" name="Shape 51"/>
-          <p:cNvSpPr/>
-          <p:nvPr/>
-        </p:nvSpPr>
-        <p:spPr>
-          <a:xfrm>
-            <a:off x="5212080" y="6108192"/>
-            <a:ext cx="292608" cy="182880"/>
-          </a:xfrm>
-          <a:prstGeom prst="roundRect">
-            <a:avLst>
-              <a:gd name="adj" fmla="val 20000"/>
-            </a:avLst>
-          </a:prstGeom>
-          <a:solidFill>
-            <a:srgbClr val="1F7A55"/>
-          </a:solidFill>
-          <a:ln w="12700">
-            <a:solidFill>
-              <a:srgbClr val="1F7A55"/>
-            </a:solidFill>
-            <a:prstDash val="solid"/>
-          </a:ln>
-        </p:spPr>
-      </p:sp>
-      <p:sp>
-        <p:nvSpPr>
-          <p:cNvPr id="54" name="Text 52"/>
-          <p:cNvSpPr txBox="1"/>
-          <p:nvPr/>
-        </p:nvSpPr>
-        <p:spPr>
-          <a:xfrm>
-            <a:off x="5596128" y="6080760"/>
-            <a:ext cx="1188720" cy="237744"/>
-          </a:xfrm>
-          <a:prstGeom prst="rect">
-            <a:avLst/>
-          </a:prstGeom>
-          <a:noFill/>
-          <a:ln/>
-        </p:spPr>
-        <p:txBody>
-          <a:bodyPr wrap="square" lIns="0" tIns="0" rIns="0" bIns="0" rtlCol="0" anchor="t"/>
-          <a:lstStyle/>
-          <a:p>
-            <a:pPr indent="0" marL="0">
-              <a:buNone/>
-            </a:pPr>
-            <a:r>
-              <a:rPr lang="en-US" sz="1050" dirty="0">
-                <a:solidFill>
-                  <a:srgbClr val="505B55"/>
-                </a:solidFill>
-                <a:latin typeface="Malgun Gothic" pitchFamily="34" charset="0"/>
-                <a:ea typeface="Malgun Gothic" pitchFamily="34" charset="-122"/>
-                <a:cs typeface="Malgun Gothic" pitchFamily="34" charset="-120"/>
-              </a:rPr>
-              <a:t>계산 기준</a:t>
-            </a:r>
-            <a:endParaRPr lang="en-US" sz="1050" dirty="0"/>
-          </a:p>
-        </p:txBody>
-      </p:sp>
-      <p:sp>
-        <p:nvSpPr>
-          <p:cNvPr id="55" name="Shape 53"/>
-          <p:cNvSpPr/>
-          <p:nvPr/>
-        </p:nvSpPr>
-        <p:spPr>
-          <a:xfrm>
-            <a:off x="6812280" y="6108192"/>
-            <a:ext cx="292608" cy="182880"/>
-          </a:xfrm>
-          <a:prstGeom prst="roundRect">
-            <a:avLst>
-              <a:gd name="adj" fmla="val 20000"/>
-            </a:avLst>
-          </a:prstGeom>
-          <a:solidFill>
-            <a:srgbClr val="6A4C93"/>
-          </a:solidFill>
-          <a:ln w="12700">
-            <a:solidFill>
-              <a:srgbClr val="6A4C93"/>
-            </a:solidFill>
-            <a:prstDash val="solid"/>
-          </a:ln>
-        </p:spPr>
-      </p:sp>
-      <p:sp>
-        <p:nvSpPr>
-          <p:cNvPr id="56" name="Text 54"/>
-          <p:cNvSpPr txBox="1"/>
-          <p:nvPr/>
-        </p:nvSpPr>
-        <p:spPr>
-          <a:xfrm>
-            <a:off x="7196328" y="6080760"/>
-            <a:ext cx="1188720" cy="237744"/>
-          </a:xfrm>
-          <a:prstGeom prst="rect">
-            <a:avLst/>
-          </a:prstGeom>
-          <a:noFill/>
-          <a:ln/>
-        </p:spPr>
-        <p:txBody>
-          <a:bodyPr wrap="square" lIns="0" tIns="0" rIns="0" bIns="0" rtlCol="0" anchor="t"/>
-          <a:lstStyle/>
-          <a:p>
-            <a:pPr indent="0" marL="0">
-              <a:buNone/>
-            </a:pPr>
-            <a:r>
-              <a:rPr lang="en-US" sz="1050" dirty="0">
-                <a:solidFill>
-                  <a:srgbClr val="505B55"/>
-                </a:solidFill>
-                <a:latin typeface="Malgun Gothic" pitchFamily="34" charset="0"/>
-                <a:ea typeface="Malgun Gothic" pitchFamily="34" charset="-122"/>
-                <a:cs typeface="Malgun Gothic" pitchFamily="34" charset="-120"/>
-              </a:rPr>
-              <a:t>팀 수집 (격자)</a:t>
-            </a:r>
-            <a:endParaRPr lang="en-US" sz="1050" dirty="0"/>
-          </a:p>
-        </p:txBody>
-      </p:sp>
-      <p:sp>
-        <p:nvSpPr>
-          <p:cNvPr id="57" name="Shape 55"/>
-          <p:cNvSpPr/>
-          <p:nvPr/>
-        </p:nvSpPr>
-        <p:spPr>
-          <a:xfrm>
-            <a:off x="8412480" y="6108192"/>
-            <a:ext cx="292608" cy="182880"/>
-          </a:xfrm>
-          <a:prstGeom prst="roundRect">
-            <a:avLst>
-              <a:gd name="adj" fmla="val 20000"/>
-            </a:avLst>
-          </a:prstGeom>
-          <a:solidFill>
-            <a:srgbClr val="D9913A"/>
-          </a:solidFill>
-          <a:ln w="12700">
-            <a:solidFill>
-              <a:srgbClr val="D9913A"/>
-            </a:solidFill>
-            <a:prstDash val="solid"/>
-          </a:ln>
-        </p:spPr>
-      </p:sp>
-      <p:sp>
-        <p:nvSpPr>
           <p:cNvPr id="58" name="Text 56"/>
-          <p:cNvSpPr txBox="1"/>
-          <p:nvPr/>
-        </p:nvSpPr>
-        <p:spPr>
-          <a:xfrm>
-            <a:off x="8796528" y="6080760"/>
-            <a:ext cx="1188720" cy="237744"/>
-          </a:xfrm>
-          <a:prstGeom prst="rect">
-            <a:avLst/>
-          </a:prstGeom>
-          <a:noFill/>
-          <a:ln/>
-        </p:spPr>
-        <p:txBody>
-          <a:bodyPr wrap="square" lIns="0" tIns="0" rIns="0" bIns="0" rtlCol="0" anchor="t"/>
-          <a:lstStyle/>
-          <a:p>
-            <a:pPr indent="0" marL="0">
-              <a:buNone/>
-            </a:pPr>
-            <a:r>
-              <a:rPr lang="en-US" sz="1050" dirty="0">
-                <a:solidFill>
-                  <a:srgbClr val="505B55"/>
-                </a:solidFill>
-                <a:latin typeface="Malgun Gothic" pitchFamily="34" charset="0"/>
-                <a:ea typeface="Malgun Gothic" pitchFamily="34" charset="-122"/>
-                <a:cs typeface="Malgun Gothic" pitchFamily="34" charset="-120"/>
-              </a:rPr>
-              <a:t>지역 상세 관측</a:t>
-            </a:r>
-            <a:endParaRPr lang="en-US" sz="1050" dirty="0"/>
-          </a:p>
-        </p:txBody>
-      </p:sp>
-      <p:sp>
-        <p:nvSpPr>
-          <p:cNvPr id="59" name="Shape 57"/>
-          <p:cNvSpPr/>
-          <p:nvPr/>
-        </p:nvSpPr>
-        <p:spPr>
-          <a:xfrm>
-            <a:off x="10012680" y="6108192"/>
-            <a:ext cx="292608" cy="182880"/>
-          </a:xfrm>
-          <a:prstGeom prst="roundRect">
-            <a:avLst>
-              <a:gd name="adj" fmla="val 20000"/>
-            </a:avLst>
-          </a:prstGeom>
-          <a:solidFill>
-            <a:srgbClr val="FFFFFF"/>
-          </a:solidFill>
-          <a:ln w="12700">
-            <a:solidFill>
-              <a:srgbClr val="D9913A"/>
-            </a:solidFill>
-            <a:prstDash val="dash"/>
-          </a:ln>
-        </p:spPr>
-      </p:sp>
-      <p:sp>
-        <p:nvSpPr>
-          <p:cNvPr id="60" name="Text 58"/>
           <p:cNvSpPr txBox="1"/>
           <p:nvPr/>
         </p:nvSpPr>
